--- a/2.0mil_surgical.pptx
+++ b/2.0mil_surgical.pptx
@@ -7277,7 +7277,7 @@
                           <a:ea typeface="Calibri" pitchFamily="34" charset="-122"/>
                           <a:cs typeface="Calibri" pitchFamily="34" charset="-120"/>
                         </a:rPr>
-                        <a:t>85%</a:t>
+                        <a:t>82%</a:t>
                       </a:r>
                       <a:endParaRPr lang="en-US" sz="750" dirty="0">
                         <a:latin typeface="Calibri" charset="0"/>
@@ -15105,7 +15105,7 @@
                           <a:ea typeface="Calibri" pitchFamily="34" charset="-122"/>
                           <a:cs typeface="Calibri" pitchFamily="34" charset="-120"/>
                         </a:rPr>
-                        <a:t>Blepharoplasty</a:t>
+                        <a:t>Blepharoplasty (facility fee)</a:t>
                       </a:r>
                       <a:endParaRPr lang="en-US" sz="750" dirty="0">
                         <a:latin typeface="Calibri" charset="0"/>
@@ -15241,7 +15241,7 @@
                           <a:ea typeface="Calibri" pitchFamily="34" charset="-122"/>
                           <a:cs typeface="Calibri" pitchFamily="34" charset="-120"/>
                         </a:rPr>
-                        <a:t>$6,250</a:t>
+                        <a:t>$2,800</a:t>
                       </a:r>
                       <a:endParaRPr lang="en-US" sz="750" dirty="0">
                         <a:latin typeface="Calibri" charset="0"/>
@@ -15309,7 +15309,7 @@
                           <a:ea typeface="Calibri" pitchFamily="34" charset="-122"/>
                           <a:cs typeface="Calibri" pitchFamily="34" charset="-120"/>
                         </a:rPr>
-                        <a:t>72%</a:t>
+                        <a:t>80%</a:t>
                       </a:r>
                       <a:endParaRPr lang="en-US" sz="750" dirty="0">
                         <a:latin typeface="Calibri" charset="0"/>
@@ -15445,7 +15445,7 @@
                           <a:ea typeface="Calibri" pitchFamily="34" charset="-122"/>
                           <a:cs typeface="Calibri" pitchFamily="34" charset="-120"/>
                         </a:rPr>
-                        <a:t>$43,750</a:t>
+                        <a:t>$19,600</a:t>
                       </a:r>
                       <a:endParaRPr lang="en-US" sz="750" dirty="0">
                         <a:latin typeface="Calibri" charset="0"/>
@@ -15515,7 +15515,7 @@
                           <a:ea typeface="Calibri" pitchFamily="34" charset="-122"/>
                           <a:cs typeface="Calibri" pitchFamily="34" charset="-120"/>
                         </a:rPr>
-                        <a:t>Facial Contouring Surgery</a:t>
+                        <a:t>Facial Contouring Surgery (facility fee)</a:t>
                       </a:r>
                       <a:endParaRPr lang="en-US" sz="750" dirty="0">
                         <a:latin typeface="Calibri" charset="0"/>
@@ -15651,7 +15651,7 @@
                           <a:ea typeface="Calibri" pitchFamily="34" charset="-122"/>
                           <a:cs typeface="Calibri" pitchFamily="34" charset="-120"/>
                         </a:rPr>
-                        <a:t>$6,250</a:t>
+                        <a:t>$2,800</a:t>
                       </a:r>
                       <a:endParaRPr lang="en-US" sz="750" dirty="0">
                         <a:latin typeface="Calibri" charset="0"/>
@@ -15719,7 +15719,7 @@
                           <a:ea typeface="Calibri" pitchFamily="34" charset="-122"/>
                           <a:cs typeface="Calibri" pitchFamily="34" charset="-120"/>
                         </a:rPr>
-                        <a:t>72%</a:t>
+                        <a:t>80%</a:t>
                       </a:r>
                       <a:endParaRPr lang="en-US" sz="750" dirty="0">
                         <a:latin typeface="Calibri" charset="0"/>
@@ -15855,7 +15855,7 @@
                           <a:ea typeface="Calibri" pitchFamily="34" charset="-122"/>
                           <a:cs typeface="Calibri" pitchFamily="34" charset="-120"/>
                         </a:rPr>
-                        <a:t>$31,250</a:t>
+                        <a:t>$14,000</a:t>
                       </a:r>
                       <a:endParaRPr lang="en-US" sz="750" dirty="0">
                         <a:latin typeface="Calibri" charset="0"/>
@@ -15925,7 +15925,7 @@
                           <a:ea typeface="Calibri" pitchFamily="34" charset="-122"/>
                           <a:cs typeface="Calibri" pitchFamily="34" charset="-120"/>
                         </a:rPr>
-                        <a:t>Awake Liposuction &amp; Body Contouring</a:t>
+                        <a:t>Awake Liposuction &amp; Body Contouring (facility fee)</a:t>
                       </a:r>
                       <a:endParaRPr lang="en-US" sz="750" dirty="0">
                         <a:latin typeface="Calibri" charset="0"/>
@@ -16061,7 +16061,7 @@
                           <a:ea typeface="Calibri" pitchFamily="34" charset="-122"/>
                           <a:cs typeface="Calibri" pitchFamily="34" charset="-120"/>
                         </a:rPr>
-                        <a:t>$6,750</a:t>
+                        <a:t>$3,800</a:t>
                       </a:r>
                       <a:endParaRPr lang="en-US" sz="750" dirty="0">
                         <a:latin typeface="Calibri" charset="0"/>
@@ -16129,7 +16129,7 @@
                           <a:ea typeface="Calibri" pitchFamily="34" charset="-122"/>
                           <a:cs typeface="Calibri" pitchFamily="34" charset="-120"/>
                         </a:rPr>
-                        <a:t>70%</a:t>
+                        <a:t>78%</a:t>
                       </a:r>
                       <a:endParaRPr lang="en-US" sz="750" dirty="0">
                         <a:latin typeface="Calibri" charset="0"/>
@@ -16265,7 +16265,7 @@
                           <a:ea typeface="Calibri" pitchFamily="34" charset="-122"/>
                           <a:cs typeface="Calibri" pitchFamily="34" charset="-120"/>
                         </a:rPr>
-                        <a:t>$40,500</a:t>
+                        <a:t>$22,800</a:t>
                       </a:r>
                       <a:endParaRPr lang="en-US" sz="750" dirty="0">
                         <a:latin typeface="Calibri" charset="0"/>
@@ -16335,7 +16335,7 @@
                           <a:ea typeface="Calibri" pitchFamily="34" charset="-122"/>
                           <a:cs typeface="Calibri" pitchFamily="34" charset="-120"/>
                         </a:rPr>
-                        <a:t>Fat Grafting &amp; Transfer</a:t>
+                        <a:t>Fat Grafting &amp; Transfer (facility fee)</a:t>
                       </a:r>
                       <a:endParaRPr lang="en-US" sz="750" dirty="0">
                         <a:latin typeface="Calibri" charset="0"/>
@@ -16471,7 +16471,7 @@
                           <a:ea typeface="Calibri" pitchFamily="34" charset="-122"/>
                           <a:cs typeface="Calibri" pitchFamily="34" charset="-120"/>
                         </a:rPr>
-                        <a:t>$5,250</a:t>
+                        <a:t>$2,800</a:t>
                       </a:r>
                       <a:endParaRPr lang="en-US" sz="750" dirty="0">
                         <a:latin typeface="Calibri" charset="0"/>
@@ -16539,7 +16539,7 @@
                           <a:ea typeface="Calibri" pitchFamily="34" charset="-122"/>
                           <a:cs typeface="Calibri" pitchFamily="34" charset="-120"/>
                         </a:rPr>
-                        <a:t>72%</a:t>
+                        <a:t>80%</a:t>
                       </a:r>
                       <a:endParaRPr lang="en-US" sz="750" dirty="0">
                         <a:latin typeface="Calibri" charset="0"/>
@@ -16675,7 +16675,7 @@
                           <a:ea typeface="Calibri" pitchFamily="34" charset="-122"/>
                           <a:cs typeface="Calibri" pitchFamily="34" charset="-120"/>
                         </a:rPr>
-                        <a:t>$21,000</a:t>
+                        <a:t>$11,200</a:t>
                       </a:r>
                       <a:endParaRPr lang="en-US" sz="750" dirty="0">
                         <a:latin typeface="Calibri" charset="0"/>
@@ -18157,7 +18157,7 @@
                           <a:ea typeface="Calibri" pitchFamily="34" charset="-122"/>
                           <a:cs typeface="Calibri" pitchFamily="34" charset="-120"/>
                         </a:rPr>
-                        <a:t>72%</a:t>
+                        <a:t>77%</a:t>
                       </a:r>
                       <a:endParaRPr lang="en-US" sz="750" dirty="0">
                         <a:latin typeface="Calibri" charset="0"/>
@@ -18293,7 +18293,7 @@
                           <a:ea typeface="Calibri" pitchFamily="34" charset="-122"/>
                           <a:cs typeface="Calibri" pitchFamily="34" charset="-120"/>
                         </a:rPr>
-                        <a:t>$214,150</a:t>
+                        <a:t>$145,250</a:t>
                       </a:r>
                       <a:endParaRPr lang="en-US" sz="750" dirty="0">
                         <a:latin typeface="Calibri" charset="0"/>
@@ -18357,8 +18357,8 @@
         </p:nvSpPr>
         <p:spPr>
           <a:xfrm>
-            <a:off x="502920" y="3429000"/>
-            <a:ext cx="8138160" cy="548640"/>
+            <a:off x="502920" y="3310128"/>
+            <a:ext cx="8138160" cy="868680"/>
           </a:xfrm>
           <a:prstGeom prst="rect">
             <a:avLst/>
@@ -18372,12 +18372,29 @@
           <a:p>
             <a:pPr indent="0" marL="0">
               <a:lnSpc>
-                <a:spcPct val="120000"/>
+                <a:spcPct val="118000"/>
               </a:lnSpc>
               <a:buNone/>
             </a:pPr>
             <a:r>
-              <a:rPr lang="en-US" sz="900" dirty="0">
+              <a:rPr lang="en-US" sz="850" b="1" dirty="0">
+                <a:solidFill>
+                  <a:srgbClr val="C08D7C"/>
+                </a:solidFill>
+                <a:latin typeface="Calibri" pitchFamily="34" charset="0"/>
+                <a:ea typeface="Calibri" pitchFamily="34" charset="-122"/>
+                <a:cs typeface="Calibri" pitchFamily="34" charset="-120"/>
+              </a:rPr>
+              <a:t>The four operating-room lines are FACILITY FEES. </a:t>
+            </a:r>
+            <a:pPr indent="0" marL="0">
+              <a:lnSpc>
+                <a:spcPct val="118000"/>
+              </a:lnSpc>
+              <a:buNone/>
+            </a:pPr>
+            <a:r>
+              <a:rPr lang="en-US" sz="850" dirty="0">
                 <a:solidFill>
                   <a:srgbClr val="6E6A62"/>
                 </a:solidFill>
@@ -18385,9 +18402,9 @@
                 <a:ea typeface="Calibri" pitchFamily="34" charset="-122"/>
                 <a:cs typeface="Calibri" pitchFamily="34" charset="-120"/>
               </a:rPr>
-              <a:t>Only the four operating-room lines consume the OR. Hair restoration, ablative laser and office excisions run under local in the treatment rooms the clinic already has, which is what holds the surgical suite to 900 square feet with no dedicated procedure room.</a:t>
+              <a:t>They are what L&amp;K collects for the room, clinical staff, supplies, sedation monitoring and recovery. The surgeon is a principal who bills the patient directly for their professional fee, which never appears on these books — so the all-in price a patient pays is materially higher than the figures above. That is also why OR margins exceed the treatment-room lines: with no surgeon share to pay, facility cost of goods is disposables, implants, drugs and linens only. Across 38.5 OR hours a month the schedule works out to about $1,756 per operating-room hour. Hair restoration, ablative laser and office excisions bill the full fee, because the clinic’s own clinicians perform them in treatment rooms it already has.</a:t>
             </a:r>
-            <a:endParaRPr lang="en-US" sz="900" dirty="0"/>
+            <a:endParaRPr lang="en-US" sz="850" dirty="0"/>
           </a:p>
         </p:txBody>
       </p:sp>
@@ -18871,7 +18888,7 @@
                           <a:ea typeface="Calibri" pitchFamily="34" charset="-122"/>
                           <a:cs typeface="Calibri" pitchFamily="34" charset="-120"/>
                         </a:rPr>
-                        <a:t>$633,380</a:t>
+                        <a:t>$564,480</a:t>
                       </a:r>
                       <a:endParaRPr lang="en-US" sz="950" dirty="0">
                         <a:latin typeface="Calibri" charset="0"/>
@@ -19147,7 +19164,7 @@
                           <a:ea typeface="Calibri" pitchFamily="34" charset="-122"/>
                           <a:cs typeface="Calibri" pitchFamily="34" charset="-120"/>
                         </a:rPr>
-                        <a:t>-$40,310</a:t>
+                        <a:t>-$34,798</a:t>
                       </a:r>
                       <a:endParaRPr lang="en-US" sz="950" dirty="0">
                         <a:latin typeface="Calibri" charset="0"/>
@@ -19285,7 +19302,7 @@
                           <a:ea typeface="Calibri" pitchFamily="34" charset="-122"/>
                           <a:cs typeface="Calibri" pitchFamily="34" charset="-120"/>
                         </a:rPr>
-                        <a:t>$463,570</a:t>
+                        <a:t>$400,182</a:t>
                       </a:r>
                       <a:endParaRPr lang="en-US" sz="950" dirty="0">
                         <a:latin typeface="Calibri" charset="0"/>
@@ -19699,7 +19716,7 @@
                           <a:ea typeface="Calibri" pitchFamily="34" charset="-122"/>
                           <a:cs typeface="Calibri" pitchFamily="34" charset="-120"/>
                         </a:rPr>
-                        <a:t>$714,195</a:t>
+                        <a:t>$650,807</a:t>
                       </a:r>
                       <a:endParaRPr lang="en-US" sz="950" dirty="0">
                         <a:latin typeface="Calibri" charset="0"/>
@@ -20060,7 +20077,7 @@
         </p:nvSpPr>
         <p:spPr>
           <a:xfrm>
-            <a:off x="502920" y="2696944"/>
+            <a:off x="502920" y="2569319"/>
             <a:ext cx="8138160" cy="10973"/>
           </a:xfrm>
           <a:prstGeom prst="rect">
@@ -20085,8 +20102,8 @@
         </p:nvSpPr>
         <p:spPr>
           <a:xfrm>
-            <a:off x="539090" y="2696944"/>
-            <a:ext cx="153721" cy="904836"/>
+            <a:off x="539090" y="2569319"/>
+            <a:ext cx="153721" cy="973870"/>
           </a:xfrm>
           <a:prstGeom prst="rect">
             <a:avLst/>
@@ -20110,8 +20127,8 @@
         </p:nvSpPr>
         <p:spPr>
           <a:xfrm>
-            <a:off x="765150" y="2696944"/>
-            <a:ext cx="153721" cy="904836"/>
+            <a:off x="765150" y="2569319"/>
+            <a:ext cx="153721" cy="973870"/>
           </a:xfrm>
           <a:prstGeom prst="rect">
             <a:avLst/>
@@ -20135,8 +20152,8 @@
         </p:nvSpPr>
         <p:spPr>
           <a:xfrm>
-            <a:off x="991210" y="2696944"/>
-            <a:ext cx="153721" cy="904836"/>
+            <a:off x="991210" y="2569319"/>
+            <a:ext cx="153721" cy="973870"/>
           </a:xfrm>
           <a:prstGeom prst="rect">
             <a:avLst/>
@@ -20160,8 +20177,8 @@
         </p:nvSpPr>
         <p:spPr>
           <a:xfrm>
-            <a:off x="1217270" y="2696944"/>
-            <a:ext cx="153721" cy="904836"/>
+            <a:off x="1217270" y="2569319"/>
+            <a:ext cx="153721" cy="973870"/>
           </a:xfrm>
           <a:prstGeom prst="rect">
             <a:avLst/>
@@ -20185,8 +20202,8 @@
         </p:nvSpPr>
         <p:spPr>
           <a:xfrm>
-            <a:off x="1443330" y="2696944"/>
-            <a:ext cx="153721" cy="904836"/>
+            <a:off x="1443330" y="2569319"/>
+            <a:ext cx="153721" cy="973870"/>
           </a:xfrm>
           <a:prstGeom prst="rect">
             <a:avLst/>
@@ -20210,8 +20227,8 @@
         </p:nvSpPr>
         <p:spPr>
           <a:xfrm>
-            <a:off x="1669390" y="2696944"/>
-            <a:ext cx="153721" cy="904836"/>
+            <a:off x="1669390" y="2569319"/>
+            <a:ext cx="153721" cy="973870"/>
           </a:xfrm>
           <a:prstGeom prst="rect">
             <a:avLst/>
@@ -20274,8 +20291,8 @@
         </p:nvSpPr>
         <p:spPr>
           <a:xfrm>
-            <a:off x="1895450" y="2696944"/>
-            <a:ext cx="153721" cy="1253264"/>
+            <a:off x="1895450" y="2569319"/>
+            <a:ext cx="153721" cy="1380889"/>
           </a:xfrm>
           <a:prstGeom prst="rect">
             <a:avLst/>
@@ -20299,8 +20316,8 @@
         </p:nvSpPr>
         <p:spPr>
           <a:xfrm>
-            <a:off x="2121510" y="2696944"/>
-            <a:ext cx="153721" cy="993601"/>
+            <a:off x="2121510" y="2569319"/>
+            <a:ext cx="153721" cy="1116355"/>
           </a:xfrm>
           <a:prstGeom prst="rect">
             <a:avLst/>
@@ -20324,8 +20341,8 @@
         </p:nvSpPr>
         <p:spPr>
           <a:xfrm>
-            <a:off x="2347570" y="2696944"/>
-            <a:ext cx="153721" cy="696850"/>
+            <a:off x="2347570" y="2569319"/>
+            <a:ext cx="153721" cy="814032"/>
           </a:xfrm>
           <a:prstGeom prst="rect">
             <a:avLst/>
@@ -20349,8 +20366,8 @@
         </p:nvSpPr>
         <p:spPr>
           <a:xfrm>
-            <a:off x="2573630" y="2696944"/>
-            <a:ext cx="153721" cy="474282"/>
+            <a:off x="2573630" y="2569319"/>
+            <a:ext cx="153721" cy="587293"/>
           </a:xfrm>
           <a:prstGeom prst="rect">
             <a:avLst/>
@@ -20374,8 +20391,8 @@
         </p:nvSpPr>
         <p:spPr>
           <a:xfrm>
-            <a:off x="2799690" y="2696944"/>
-            <a:ext cx="153721" cy="251715"/>
+            <a:off x="2799690" y="2569319"/>
+            <a:ext cx="153721" cy="360547"/>
           </a:xfrm>
           <a:prstGeom prst="rect">
             <a:avLst/>
@@ -20399,8 +20416,8 @@
         </p:nvSpPr>
         <p:spPr>
           <a:xfrm>
-            <a:off x="3025750" y="2696944"/>
-            <a:ext cx="153721" cy="29155"/>
+            <a:off x="3025750" y="2569319"/>
+            <a:ext cx="153721" cy="133809"/>
           </a:xfrm>
           <a:prstGeom prst="rect">
             <a:avLst/>
@@ -20463,8 +20480,8 @@
         </p:nvSpPr>
         <p:spPr>
           <a:xfrm>
-            <a:off x="3251810" y="2503531"/>
-            <a:ext cx="153721" cy="193413"/>
+            <a:off x="3251810" y="2476381"/>
+            <a:ext cx="153721" cy="92938"/>
           </a:xfrm>
           <a:prstGeom prst="rect">
             <a:avLst/>
@@ -20488,8 +20505,8 @@
         </p:nvSpPr>
         <p:spPr>
           <a:xfrm>
-            <a:off x="3477870" y="2355155"/>
-            <a:ext cx="153721" cy="341788"/>
+            <a:off x="3477870" y="2325219"/>
+            <a:ext cx="153721" cy="244099"/>
           </a:xfrm>
           <a:prstGeom prst="rect">
             <a:avLst/>
@@ -20513,8 +20530,8 @@
         </p:nvSpPr>
         <p:spPr>
           <a:xfrm>
-            <a:off x="3703930" y="2206772"/>
-            <a:ext cx="153721" cy="490171"/>
+            <a:off x="3703930" y="2174058"/>
+            <a:ext cx="153721" cy="395261"/>
           </a:xfrm>
           <a:prstGeom prst="rect">
             <a:avLst/>
@@ -20538,8 +20555,8 @@
         </p:nvSpPr>
         <p:spPr>
           <a:xfrm>
-            <a:off x="3929990" y="2058397"/>
-            <a:ext cx="153721" cy="638547"/>
+            <a:off x="3929990" y="2022896"/>
+            <a:ext cx="153721" cy="546422"/>
           </a:xfrm>
           <a:prstGeom prst="rect">
             <a:avLst/>
@@ -20563,8 +20580,8 @@
         </p:nvSpPr>
         <p:spPr>
           <a:xfrm>
-            <a:off x="4156050" y="1910021"/>
-            <a:ext cx="153721" cy="786923"/>
+            <a:off x="4156050" y="1871735"/>
+            <a:ext cx="153721" cy="697584"/>
           </a:xfrm>
           <a:prstGeom prst="rect">
             <a:avLst/>
@@ -20588,8 +20605,8 @@
         </p:nvSpPr>
         <p:spPr>
           <a:xfrm>
-            <a:off x="4382110" y="1876295"/>
-            <a:ext cx="153721" cy="820649"/>
+            <a:off x="4382110" y="1841840"/>
+            <a:ext cx="153721" cy="727478"/>
           </a:xfrm>
           <a:prstGeom prst="rect">
             <a:avLst/>
@@ -20652,8 +20669,8 @@
         </p:nvSpPr>
         <p:spPr>
           <a:xfrm>
-            <a:off x="4608170" y="1842569"/>
-            <a:ext cx="153721" cy="854375"/>
+            <a:off x="4608170" y="1811938"/>
+            <a:ext cx="153721" cy="757380"/>
           </a:xfrm>
           <a:prstGeom prst="rect">
             <a:avLst/>
@@ -20677,8 +20694,8 @@
         </p:nvSpPr>
         <p:spPr>
           <a:xfrm>
-            <a:off x="4834230" y="1808843"/>
-            <a:ext cx="153721" cy="888101"/>
+            <a:off x="4834230" y="1782044"/>
+            <a:ext cx="153721" cy="787275"/>
           </a:xfrm>
           <a:prstGeom prst="rect">
             <a:avLst/>
@@ -20702,8 +20719,8 @@
         </p:nvSpPr>
         <p:spPr>
           <a:xfrm>
-            <a:off x="5060290" y="1775117"/>
-            <a:ext cx="153721" cy="921827"/>
+            <a:off x="5060290" y="1752150"/>
+            <a:ext cx="153721" cy="817169"/>
           </a:xfrm>
           <a:prstGeom prst="rect">
             <a:avLst/>
@@ -20727,8 +20744,8 @@
         </p:nvSpPr>
         <p:spPr>
           <a:xfrm>
-            <a:off x="5286350" y="1741398"/>
-            <a:ext cx="153721" cy="955546"/>
+            <a:off x="5286350" y="1722247"/>
+            <a:ext cx="153721" cy="847071"/>
           </a:xfrm>
           <a:prstGeom prst="rect">
             <a:avLst/>
@@ -20752,8 +20769,8 @@
         </p:nvSpPr>
         <p:spPr>
           <a:xfrm>
-            <a:off x="5512410" y="1718912"/>
-            <a:ext cx="153721" cy="978032"/>
+            <a:off x="5512410" y="1702321"/>
+            <a:ext cx="153721" cy="866998"/>
           </a:xfrm>
           <a:prstGeom prst="rect">
             <a:avLst/>
@@ -20777,8 +20794,8 @@
         </p:nvSpPr>
         <p:spPr>
           <a:xfrm>
-            <a:off x="5738470" y="1696425"/>
-            <a:ext cx="153721" cy="1000519"/>
+            <a:off x="5738470" y="1682386"/>
+            <a:ext cx="153721" cy="886933"/>
           </a:xfrm>
           <a:prstGeom prst="rect">
             <a:avLst/>
@@ -20841,8 +20858,8 @@
         </p:nvSpPr>
         <p:spPr>
           <a:xfrm>
-            <a:off x="5964530" y="1673946"/>
-            <a:ext cx="153721" cy="1022998"/>
+            <a:off x="5964530" y="1662459"/>
+            <a:ext cx="153721" cy="906860"/>
           </a:xfrm>
           <a:prstGeom prst="rect">
             <a:avLst/>
@@ -20866,8 +20883,8 @@
         </p:nvSpPr>
         <p:spPr>
           <a:xfrm>
-            <a:off x="6190590" y="1651460"/>
-            <a:ext cx="153721" cy="1045484"/>
+            <a:off x="6190590" y="1642524"/>
+            <a:ext cx="153721" cy="926795"/>
           </a:xfrm>
           <a:prstGeom prst="rect">
             <a:avLst/>
@@ -20891,8 +20908,8 @@
         </p:nvSpPr>
         <p:spPr>
           <a:xfrm>
-            <a:off x="6416650" y="1640220"/>
-            <a:ext cx="153721" cy="1056724"/>
+            <a:off x="6416650" y="1632564"/>
+            <a:ext cx="153721" cy="936754"/>
           </a:xfrm>
           <a:prstGeom prst="rect">
             <a:avLst/>
@@ -20916,8 +20933,8 @@
         </p:nvSpPr>
         <p:spPr>
           <a:xfrm>
-            <a:off x="6642710" y="1617734"/>
-            <a:ext cx="153721" cy="1079210"/>
+            <a:off x="6642710" y="1612630"/>
+            <a:ext cx="153721" cy="956689"/>
           </a:xfrm>
           <a:prstGeom prst="rect">
             <a:avLst/>
@@ -20941,8 +20958,8 @@
         </p:nvSpPr>
         <p:spPr>
           <a:xfrm>
-            <a:off x="6868770" y="1606494"/>
-            <a:ext cx="153721" cy="1090450"/>
+            <a:off x="6868770" y="1602662"/>
+            <a:ext cx="153721" cy="966656"/>
           </a:xfrm>
           <a:prstGeom prst="rect">
             <a:avLst/>
@@ -20966,8 +20983,8 @@
         </p:nvSpPr>
         <p:spPr>
           <a:xfrm>
-            <a:off x="7094830" y="1595254"/>
-            <a:ext cx="153721" cy="1101689"/>
+            <a:off x="7094830" y="1592703"/>
+            <a:ext cx="153721" cy="976616"/>
           </a:xfrm>
           <a:prstGeom prst="rect">
             <a:avLst/>
@@ -21030,8 +21047,8 @@
         </p:nvSpPr>
         <p:spPr>
           <a:xfrm>
-            <a:off x="7320890" y="1584008"/>
-            <a:ext cx="153721" cy="1112936"/>
+            <a:off x="7320890" y="1582735"/>
+            <a:ext cx="153721" cy="986583"/>
           </a:xfrm>
           <a:prstGeom prst="rect">
             <a:avLst/>
@@ -21056,7 +21073,7 @@
         <p:spPr>
           <a:xfrm>
             <a:off x="7546950" y="1572768"/>
-            <a:ext cx="153721" cy="1124176"/>
+            <a:ext cx="153721" cy="996551"/>
           </a:xfrm>
           <a:prstGeom prst="rect">
             <a:avLst/>
@@ -21081,7 +21098,7 @@
         <p:spPr>
           <a:xfrm>
             <a:off x="7773010" y="1572768"/>
-            <a:ext cx="153721" cy="1124176"/>
+            <a:ext cx="153721" cy="996551"/>
           </a:xfrm>
           <a:prstGeom prst="rect">
             <a:avLst/>
@@ -21106,7 +21123,7 @@
         <p:spPr>
           <a:xfrm>
             <a:off x="7999070" y="1572768"/>
-            <a:ext cx="153721" cy="1124176"/>
+            <a:ext cx="153721" cy="996551"/>
           </a:xfrm>
           <a:prstGeom prst="rect">
             <a:avLst/>
@@ -21131,7 +21148,7 @@
         <p:spPr>
           <a:xfrm>
             <a:off x="8225130" y="1572768"/>
-            <a:ext cx="153721" cy="1124176"/>
+            <a:ext cx="153721" cy="996551"/>
           </a:xfrm>
           <a:prstGeom prst="rect">
             <a:avLst/>
@@ -21156,7 +21173,7 @@
         <p:spPr>
           <a:xfrm>
             <a:off x="8451190" y="1572768"/>
-            <a:ext cx="153721" cy="1124176"/>
+            <a:ext cx="153721" cy="996551"/>
           </a:xfrm>
           <a:prstGeom prst="rect">
             <a:avLst/>
@@ -21244,7 +21261,7 @@
                 <a:ea typeface="Calibri" pitchFamily="34" charset="-122"/>
                 <a:cs typeface="Calibri" pitchFamily="34" charset="-120"/>
               </a:rPr>
-              <a:t>$158,130 / mo</a:t>
+              <a:t>$127,376 / mo</a:t>
             </a:r>
             <a:endParaRPr lang="en-US" sz="700" dirty="0"/>
           </a:p>
@@ -21283,7 +21300,7 @@
                 <a:ea typeface="Calibri" pitchFamily="34" charset="-122"/>
                 <a:cs typeface="Calibri" pitchFamily="34" charset="-120"/>
               </a:rPr>
-              <a:t>$-176,288 / mo</a:t>
+              <a:t>$-176,501 / mo</a:t>
             </a:r>
             <a:endParaRPr lang="en-US" sz="700" dirty="0"/>
           </a:p>
@@ -21322,7 +21339,7 @@
                 <a:ea typeface="Calibri" pitchFamily="34" charset="-122"/>
                 <a:cs typeface="Calibri" pitchFamily="34" charset="-120"/>
               </a:rPr>
-              <a:t>Cash trough -$997,795 at month 13, against a $1,207,000 working capital and debt service reserve funded inside use of funds.</a:t>
+              <a:t>Cash trough -$1,037,517 at month 13, against a $1,395,000 working capital and debt service reserve funded inside use of funds.</a:t>
             </a:r>
             <a:endParaRPr lang="en-US" sz="950" dirty="0"/>
           </a:p>
@@ -21835,7 +21852,7 @@
                           <a:ea typeface="Calibri" pitchFamily="34" charset="-122"/>
                           <a:cs typeface="Calibri" pitchFamily="34" charset="-120"/>
                         </a:rPr>
-                        <a:t>$714,195</a:t>
+                        <a:t>$650,807</a:t>
                       </a:r>
                       <a:endParaRPr lang="en-US" sz="800" dirty="0">
                         <a:latin typeface="Calibri" charset="0"/>
@@ -22041,7 +22058,7 @@
                           <a:ea typeface="Calibri" pitchFamily="34" charset="-122"/>
                           <a:cs typeface="Calibri" pitchFamily="34" charset="-120"/>
                         </a:rPr>
-                        <a:t>-$173,655</a:t>
+                        <a:t>-$149,021</a:t>
                       </a:r>
                       <a:endParaRPr lang="en-US" sz="800" dirty="0">
                         <a:latin typeface="Calibri" charset="0"/>
@@ -22109,7 +22126,7 @@
                           <a:ea typeface="Calibri" pitchFamily="34" charset="-122"/>
                           <a:cs typeface="Calibri" pitchFamily="34" charset="-120"/>
                         </a:rPr>
-                        <a:t>24%</a:t>
+                        <a:t>23%</a:t>
                       </a:r>
                       <a:endParaRPr lang="en-US" sz="800" dirty="0">
                         <a:latin typeface="Calibri" charset="0"/>
@@ -22453,7 +22470,7 @@
                           <a:ea typeface="Calibri" pitchFamily="34" charset="-122"/>
                           <a:cs typeface="Calibri" pitchFamily="34" charset="-120"/>
                         </a:rPr>
-                        <a:t>$521,780</a:t>
+                        <a:t>$483,026</a:t>
                       </a:r>
                       <a:endParaRPr lang="en-US" sz="800" dirty="0">
                         <a:latin typeface="Calibri" charset="0"/>
@@ -22521,7 +22538,7 @@
                           <a:ea typeface="Calibri" pitchFamily="34" charset="-122"/>
                           <a:cs typeface="Calibri" pitchFamily="34" charset="-120"/>
                         </a:rPr>
-                        <a:t>73%</a:t>
+                        <a:t>74%</a:t>
                       </a:r>
                       <a:endParaRPr lang="en-US" sz="800" dirty="0">
                         <a:latin typeface="Calibri" charset="0"/>
@@ -22727,7 +22744,7 @@
                           <a:ea typeface="Calibri" pitchFamily="34" charset="-122"/>
                           <a:cs typeface="Calibri" pitchFamily="34" charset="-120"/>
                         </a:rPr>
-                        <a:t>5%</a:t>
+                        <a:t>6%</a:t>
                       </a:r>
                       <a:endParaRPr lang="en-US" sz="800" dirty="0">
                         <a:latin typeface="Calibri" charset="0"/>
@@ -22865,7 +22882,7 @@
                           <a:ea typeface="Calibri" pitchFamily="34" charset="-122"/>
                           <a:cs typeface="Calibri" pitchFamily="34" charset="-120"/>
                         </a:rPr>
-                        <a:t>-$173,000</a:t>
+                        <a:t>-$165,000</a:t>
                       </a:r>
                       <a:endParaRPr lang="en-US" sz="800" dirty="0">
                         <a:latin typeface="Calibri" charset="0"/>
@@ -22933,7 +22950,7 @@
                           <a:ea typeface="Calibri" pitchFamily="34" charset="-122"/>
                           <a:cs typeface="Calibri" pitchFamily="34" charset="-120"/>
                         </a:rPr>
-                        <a:t>24%</a:t>
+                        <a:t>25%</a:t>
                       </a:r>
                       <a:endParaRPr lang="en-US" sz="800" dirty="0">
                         <a:latin typeface="Calibri" charset="0"/>
@@ -23139,7 +23156,7 @@
                           <a:ea typeface="Calibri" pitchFamily="34" charset="-122"/>
                           <a:cs typeface="Calibri" pitchFamily="34" charset="-120"/>
                         </a:rPr>
-                        <a:t>4%</a:t>
+                        <a:t>5%</a:t>
                       </a:r>
                       <a:endParaRPr lang="en-US" sz="800" dirty="0">
                         <a:latin typeface="Calibri" charset="0"/>
@@ -23345,7 +23362,7 @@
                           <a:ea typeface="Calibri" pitchFamily="34" charset="-122"/>
                           <a:cs typeface="Calibri" pitchFamily="34" charset="-120"/>
                         </a:rPr>
-                        <a:t>4%</a:t>
+                        <a:t>5%</a:t>
                       </a:r>
                       <a:endParaRPr lang="en-US" sz="800" dirty="0">
                         <a:latin typeface="Calibri" charset="0"/>
@@ -23757,7 +23774,7 @@
                           <a:ea typeface="Calibri" pitchFamily="34" charset="-122"/>
                           <a:cs typeface="Calibri" pitchFamily="34" charset="-120"/>
                         </a:rPr>
-                        <a:t>5%</a:t>
+                        <a:t>6%</a:t>
                       </a:r>
                       <a:endParaRPr lang="en-US" sz="800" dirty="0">
                         <a:latin typeface="Calibri" charset="0"/>
@@ -24169,7 +24186,7 @@
                           <a:ea typeface="Calibri" pitchFamily="34" charset="-122"/>
                           <a:cs typeface="Calibri" pitchFamily="34" charset="-120"/>
                         </a:rPr>
-                        <a:t>1%</a:t>
+                        <a:t>2%</a:t>
                       </a:r>
                       <a:endParaRPr lang="en-US" sz="800" dirty="0">
                         <a:latin typeface="Calibri" charset="0"/>
@@ -24307,7 +24324,7 @@
                           <a:ea typeface="Calibri" pitchFamily="34" charset="-122"/>
                           <a:cs typeface="Calibri" pitchFamily="34" charset="-120"/>
                         </a:rPr>
-                        <a:t>-$363,650</a:t>
+                        <a:t>-$355,650</a:t>
                       </a:r>
                       <a:endParaRPr lang="en-US" sz="800" dirty="0">
                         <a:latin typeface="Calibri" charset="0"/>
@@ -24375,7 +24392,7 @@
                           <a:ea typeface="Calibri" pitchFamily="34" charset="-122"/>
                           <a:cs typeface="Calibri" pitchFamily="34" charset="-120"/>
                         </a:rPr>
-                        <a:t>51%</a:t>
+                        <a:t>55%</a:t>
                       </a:r>
                       <a:endParaRPr lang="en-US" sz="800" dirty="0">
                         <a:latin typeface="Calibri" charset="0"/>
@@ -24513,7 +24530,7 @@
                           <a:ea typeface="Calibri" pitchFamily="34" charset="-122"/>
                           <a:cs typeface="Calibri" pitchFamily="34" charset="-120"/>
                         </a:rPr>
-                        <a:t>$158,130</a:t>
+                        <a:t>$127,376</a:t>
                       </a:r>
                       <a:endParaRPr lang="en-US" sz="800" dirty="0">
                         <a:latin typeface="Calibri" charset="0"/>
@@ -24581,7 +24598,7 @@
                           <a:ea typeface="Calibri" pitchFamily="34" charset="-122"/>
                           <a:cs typeface="Calibri" pitchFamily="34" charset="-120"/>
                         </a:rPr>
-                        <a:t>22%</a:t>
+                        <a:t>20%</a:t>
                       </a:r>
                       <a:endParaRPr lang="en-US" sz="800" dirty="0">
                         <a:latin typeface="Calibri" charset="0"/>
@@ -24966,7 +24983,7 @@
                 <a:ea typeface="Century Gothic" pitchFamily="34" charset="-122"/>
                 <a:cs typeface="Century Gothic" pitchFamily="34" charset="-120"/>
               </a:rPr>
-              <a:t>$0.14M / yr</a:t>
+              <a:t>$-0.09M / yr</a:t>
             </a:r>
             <a:endParaRPr lang="en-US" sz="1800" dirty="0"/>
           </a:p>
@@ -25086,7 +25103,7 @@
                 <a:ea typeface="Calibri" pitchFamily="34" charset="-122"/>
                 <a:cs typeface="Calibri" pitchFamily="34" charset="-120"/>
               </a:rPr>
-              <a:t>$514,220</a:t>
+              <a:t>$468,581</a:t>
             </a:r>
             <a:endParaRPr lang="en-US" sz="900" dirty="0"/>
           </a:p>
@@ -25164,7 +25181,7 @@
                 <a:ea typeface="Calibri" pitchFamily="34" charset="-122"/>
                 <a:cs typeface="Calibri" pitchFamily="34" charset="-120"/>
               </a:rPr>
-              <a:t>$375,682</a:t>
+              <a:t>$347,779</a:t>
             </a:r>
             <a:endParaRPr lang="en-US" sz="900" dirty="0"/>
           </a:p>
@@ -25242,7 +25259,7 @@
                 <a:ea typeface="Calibri" pitchFamily="34" charset="-122"/>
                 <a:cs typeface="Calibri" pitchFamily="34" charset="-120"/>
               </a:rPr>
-              <a:t>$12,032</a:t>
+              <a:t>$-7,871</a:t>
             </a:r>
             <a:endParaRPr lang="en-US" sz="900" dirty="0"/>
           </a:p>
@@ -25320,7 +25337,7 @@
                 <a:ea typeface="Calibri" pitchFamily="34" charset="-122"/>
                 <a:cs typeface="Calibri" pitchFamily="34" charset="-120"/>
               </a:rPr>
-              <a:t>0.24x</a:t>
+              <a:t>-0.15x</a:t>
             </a:r>
             <a:endParaRPr lang="en-US" sz="900" dirty="0"/>
           </a:p>
@@ -25425,7 +25442,7 @@
                 <a:ea typeface="Century Gothic" pitchFamily="34" charset="-122"/>
                 <a:cs typeface="Century Gothic" pitchFamily="34" charset="-120"/>
               </a:rPr>
-              <a:t>$1.90M / yr</a:t>
+              <a:t>$1.53M / yr</a:t>
             </a:r>
             <a:endParaRPr lang="en-US" sz="1800" dirty="0"/>
           </a:p>
@@ -25545,7 +25562,7 @@
                 <a:ea typeface="Calibri" pitchFamily="34" charset="-122"/>
                 <a:cs typeface="Calibri" pitchFamily="34" charset="-120"/>
               </a:rPr>
-              <a:t>$714,195</a:t>
+              <a:t>$650,807</a:t>
             </a:r>
             <a:endParaRPr lang="en-US" sz="900" dirty="0"/>
           </a:p>
@@ -25623,7 +25640,7 @@
                 <a:ea typeface="Calibri" pitchFamily="34" charset="-122"/>
                 <a:cs typeface="Calibri" pitchFamily="34" charset="-120"/>
               </a:rPr>
-              <a:t>$521,780</a:t>
+              <a:t>$483,026</a:t>
             </a:r>
             <a:endParaRPr lang="en-US" sz="900" dirty="0"/>
           </a:p>
@@ -25701,7 +25718,7 @@
                 <a:ea typeface="Calibri" pitchFamily="34" charset="-122"/>
                 <a:cs typeface="Calibri" pitchFamily="34" charset="-120"/>
               </a:rPr>
-              <a:t>$158,130</a:t>
+              <a:t>$127,376</a:t>
             </a:r>
             <a:endParaRPr lang="en-US" sz="900" dirty="0"/>
           </a:p>
@@ -25779,7 +25796,7 @@
                 <a:ea typeface="Calibri" pitchFamily="34" charset="-122"/>
                 <a:cs typeface="Calibri" pitchFamily="34" charset="-120"/>
               </a:rPr>
-              <a:t>3.11x</a:t>
+              <a:t>2.50x</a:t>
             </a:r>
             <a:endParaRPr lang="en-US" sz="900" dirty="0"/>
           </a:p>
@@ -25884,7 +25901,7 @@
                 <a:ea typeface="Century Gothic" pitchFamily="34" charset="-122"/>
                 <a:cs typeface="Century Gothic" pitchFamily="34" charset="-120"/>
               </a:rPr>
-              <a:t>$3.65M / yr</a:t>
+              <a:t>$3.15M / yr</a:t>
             </a:r>
             <a:endParaRPr lang="en-US" sz="1800" dirty="0"/>
           </a:p>
@@ -26004,7 +26021,7 @@
                 <a:ea typeface="Calibri" pitchFamily="34" charset="-122"/>
                 <a:cs typeface="Calibri" pitchFamily="34" charset="-120"/>
               </a:rPr>
-              <a:t>$914,169</a:t>
+              <a:t>$833,032</a:t>
             </a:r>
             <a:endParaRPr lang="en-US" sz="900" dirty="0"/>
           </a:p>
@@ -26082,7 +26099,7 @@
                 <a:ea typeface="Calibri" pitchFamily="34" charset="-122"/>
                 <a:cs typeface="Calibri" pitchFamily="34" charset="-120"/>
               </a:rPr>
-              <a:t>$667,878</a:t>
+              <a:t>$618,273</a:t>
             </a:r>
             <a:endParaRPr lang="en-US" sz="900" dirty="0"/>
           </a:p>
@@ -26160,7 +26177,7 @@
                 <a:ea typeface="Calibri" pitchFamily="34" charset="-122"/>
                 <a:cs typeface="Calibri" pitchFamily="34" charset="-120"/>
               </a:rPr>
-              <a:t>$304,228</a:t>
+              <a:t>$262,623</a:t>
             </a:r>
             <a:endParaRPr lang="en-US" sz="900" dirty="0"/>
           </a:p>
@@ -26238,7 +26255,7 @@
                 <a:ea typeface="Calibri" pitchFamily="34" charset="-122"/>
                 <a:cs typeface="Calibri" pitchFamily="34" charset="-120"/>
               </a:rPr>
-              <a:t>5.98x</a:t>
+              <a:t>5.16x</a:t>
             </a:r>
             <a:endParaRPr lang="en-US" sz="900" dirty="0"/>
           </a:p>
@@ -26885,7 +26902,7 @@
                 <a:ea typeface="Calibri" pitchFamily="34" charset="-122"/>
                 <a:cs typeface="Calibri" pitchFamily="34" charset="-120"/>
               </a:rPr>
-              <a:t>Project cost is unchanged. The private raise replaces the minimum equity injection, so the SBA 7(a) loan shrinks to fill the rest. Less debt against the same operating income is what lifts stabilized coverage to 3.11x.</a:t>
+              <a:t>Project cost is unchanged. The private raise replaces the minimum equity injection, so the SBA 7(a) loan shrinks to fill the rest. Less debt against the same operating income is what lifts stabilized coverage to 2.50x.</a:t>
             </a:r>
             <a:endParaRPr lang="en-US" sz="900" dirty="0"/>
           </a:p>
@@ -27669,7 +27686,7 @@
                 <a:ea typeface="Calibri" pitchFamily="34" charset="-122"/>
                 <a:cs typeface="Calibri" pitchFamily="34" charset="-120"/>
               </a:rPr>
-              <a:t>The working capital and debt service reserve is sized against the modeled cash trough of $997,795 at month 13, not to a round number.</a:t>
+              <a:t>The working capital and debt service reserve is sized against the modeled cash trough of $1,037,517 at month 13, not to a round number.</a:t>
             </a:r>
             <a:endParaRPr lang="en-US" sz="1150" dirty="0"/>
           </a:p>
@@ -29162,7 +29179,7 @@
                           <a:ea typeface="Calibri" pitchFamily="34" charset="-122"/>
                           <a:cs typeface="Calibri" pitchFamily="34" charset="-120"/>
                         </a:rPr>
-                        <a:t>Recovery technology: HBOT, Ammortal, Aescape</a:t>
+                        <a:t>Recovery technology: HBOT purchased, Ammortal deposit</a:t>
                       </a:r>
                       <a:endParaRPr lang="en-US" sz="850" dirty="0">
                         <a:latin typeface="Calibri" charset="0"/>
@@ -29230,7 +29247,7 @@
                           <a:ea typeface="Calibri" pitchFamily="34" charset="-122"/>
                           <a:cs typeface="Calibri" pitchFamily="34" charset="-120"/>
                         </a:rPr>
-                        <a:t>$370,000</a:t>
+                        <a:t>$182,000</a:t>
                       </a:r>
                       <a:endParaRPr lang="en-US" sz="850" dirty="0">
                         <a:latin typeface="Calibri" charset="0"/>
@@ -29298,7 +29315,7 @@
                           <a:ea typeface="Calibri" pitchFamily="34" charset="-122"/>
                           <a:cs typeface="Calibri" pitchFamily="34" charset="-120"/>
                         </a:rPr>
-                        <a:t>7%</a:t>
+                        <a:t>3%</a:t>
                       </a:r>
                       <a:endParaRPr lang="en-US" sz="850" dirty="0">
                         <a:latin typeface="Calibri" charset="0"/>
@@ -30260,7 +30277,7 @@
                           <a:ea typeface="Calibri" pitchFamily="34" charset="-122"/>
                           <a:cs typeface="Calibri" pitchFamily="34" charset="-120"/>
                         </a:rPr>
-                        <a:t>$1,207,000</a:t>
+                        <a:t>$1,395,000</a:t>
                       </a:r>
                       <a:endParaRPr lang="en-US" sz="850" dirty="0">
                         <a:latin typeface="Calibri" charset="0"/>
@@ -30328,7 +30345,7 @@
                           <a:ea typeface="Calibri" pitchFamily="34" charset="-122"/>
                           <a:cs typeface="Calibri" pitchFamily="34" charset="-120"/>
                         </a:rPr>
-                        <a:t>22%</a:t>
+                        <a:t>25%</a:t>
                       </a:r>
                       <a:endParaRPr lang="en-US" sz="850" dirty="0">
                         <a:latin typeface="Calibri" charset="0"/>
@@ -32132,7 +32149,7 @@
                           <a:ea typeface="Calibri" pitchFamily="34" charset="-122"/>
                           <a:cs typeface="Calibri" pitchFamily="34" charset="-120"/>
                         </a:rPr>
-                        <a:t>$1,207,000</a:t>
+                        <a:t>$1,395,000</a:t>
                       </a:r>
                       <a:endParaRPr lang="en-US" sz="950" dirty="0">
                         <a:latin typeface="Calibri" charset="0"/>
@@ -32576,7 +32593,7 @@
                           <a:ea typeface="Calibri" pitchFamily="34" charset="-122"/>
                           <a:cs typeface="Calibri" pitchFamily="34" charset="-120"/>
                         </a:rPr>
-                        <a:t>-$1,283,956</a:t>
+                        <a:t>-$1,308,352</a:t>
                       </a:r>
                       <a:endParaRPr lang="en-US" sz="950" dirty="0">
                         <a:latin typeface="Calibri" charset="0"/>
@@ -32712,7 +32729,7 @@
                           <a:ea typeface="Calibri" pitchFamily="34" charset="-122"/>
                           <a:cs typeface="Calibri" pitchFamily="34" charset="-120"/>
                         </a:rPr>
-                        <a:t>-5.08x</a:t>
+                        <a:t>-5.17x</a:t>
                       </a:r>
                       <a:endParaRPr lang="en-US" sz="950" dirty="0">
                         <a:latin typeface="Calibri" charset="0"/>
@@ -32850,7 +32867,7 @@
                           <a:ea typeface="Calibri" pitchFamily="34" charset="-122"/>
                           <a:cs typeface="Calibri" pitchFamily="34" charset="-120"/>
                         </a:rPr>
-                        <a:t>$1,247,666</a:t>
+                        <a:t>$979,922</a:t>
                       </a:r>
                       <a:endParaRPr lang="en-US" sz="950" dirty="0">
                         <a:latin typeface="Calibri" charset="0"/>
@@ -32986,7 +33003,7 @@
                           <a:ea typeface="Calibri" pitchFamily="34" charset="-122"/>
                           <a:cs typeface="Calibri" pitchFamily="34" charset="-120"/>
                         </a:rPr>
-                        <a:t>2.63x</a:t>
+                        <a:t>2.07x</a:t>
                       </a:r>
                       <a:endParaRPr lang="en-US" sz="950" dirty="0">
                         <a:latin typeface="Calibri" charset="0"/>
@@ -33124,7 +33141,7 @@
                           <a:ea typeface="Calibri" pitchFamily="34" charset="-122"/>
                           <a:cs typeface="Calibri" pitchFamily="34" charset="-120"/>
                         </a:rPr>
-                        <a:t>$1,846,958</a:t>
+                        <a:t>$1,487,751</a:t>
                       </a:r>
                       <a:endParaRPr lang="en-US" sz="950" dirty="0">
                         <a:latin typeface="Calibri" charset="0"/>
@@ -33260,7 +33277,7 @@
                           <a:ea typeface="Calibri" pitchFamily="34" charset="-122"/>
                           <a:cs typeface="Calibri" pitchFamily="34" charset="-120"/>
                         </a:rPr>
-                        <a:t>3.03x</a:t>
+                        <a:t>2.44x</a:t>
                       </a:r>
                       <a:endParaRPr lang="en-US" sz="950" dirty="0">
                         <a:latin typeface="Calibri" charset="0"/>
@@ -33398,7 +33415,7 @@
                           <a:ea typeface="Calibri" pitchFamily="34" charset="-122"/>
                           <a:cs typeface="Calibri" pitchFamily="34" charset="-120"/>
                         </a:rPr>
-                        <a:t>$1,897,560</a:t>
+                        <a:t>$1,528,512</a:t>
                       </a:r>
                       <a:endParaRPr lang="en-US" sz="950" dirty="0">
                         <a:latin typeface="Calibri" charset="0"/>
@@ -33534,7 +33551,7 @@
                           <a:ea typeface="Calibri" pitchFamily="34" charset="-122"/>
                           <a:cs typeface="Calibri" pitchFamily="34" charset="-120"/>
                         </a:rPr>
-                        <a:t>3.11x</a:t>
+                        <a:t>2.50x</a:t>
                       </a:r>
                       <a:endParaRPr lang="en-US" sz="950" dirty="0">
                         <a:latin typeface="Calibri" charset="0"/>
@@ -33623,7 +33640,7 @@
                 <a:ea typeface="Calibri" pitchFamily="34" charset="-122"/>
                 <a:cs typeface="Calibri" pitchFamily="34" charset="-120"/>
               </a:rPr>
-              <a:t>Rate sensitivity: 3.11x at 9.5%   ·   3.00x at 10.5%   ·   2.89x at 11.5%</a:t>
+              <a:t>Rate sensitivity: 2.50x at 9.5%   ·   2.41x at 10.5%   ·   2.33x at 11.5%</a:t>
             </a:r>
             <a:endParaRPr lang="en-US" sz="900" dirty="0"/>
           </a:p>
@@ -33896,7 +33913,7 @@
                 <a:ea typeface="Calibri" pitchFamily="34" charset="-122"/>
                 <a:cs typeface="Calibri" pitchFamily="34" charset="-120"/>
               </a:rPr>
-              <a:t>Year 1 operating income is negative. Six of those months are construction and the rest are the opening ramp. Debt service is interest-only for the first 18 months, and the $1,207,000 reserve inside use of funds is sized against a modeled cash trough of $997,795 at month 13.</a:t>
+              <a:t>Year 1 operating income is negative. Six of those months are construction and the rest are the opening ramp. Debt service is interest-only for the first 18 months, and the $1,395,000 reserve inside use of funds is sized against a modeled cash trough of $1,037,517 at month 13.</a:t>
             </a:r>
             <a:endParaRPr lang="en-US" sz="1050" dirty="0"/>
           </a:p>
@@ -33917,7 +33934,7 @@
                 <a:ea typeface="Calibri" pitchFamily="34" charset="-122"/>
                 <a:cs typeface="Calibri" pitchFamily="34" charset="-120"/>
               </a:rPr>
-              <a:t>Year 2 coverage of 2.63x already clears the 1.25x convention, before the business reaches stabilization.</a:t>
+              <a:t>Year 2 coverage of 2.07x already clears the 1.25x convention, before the business reaches stabilization.</a:t>
             </a:r>
             <a:endParaRPr lang="en-US" sz="1050" dirty="0"/>
           </a:p>
@@ -33938,7 +33955,7 @@
                 <a:ea typeface="Calibri" pitchFamily="34" charset="-122"/>
                 <a:cs typeface="Calibri" pitchFamily="34" charset="-120"/>
               </a:rPr>
-              <a:t>Rate sensitivity: stabilized coverage runs 3.11x at 9.5%, 3.00x at 10.5%, 2.89x at 11.5%. Coverage holds above 1.25x even 200 basis points above the assumed rate.</a:t>
+              <a:t>Rate sensitivity: stabilized coverage runs 2.50x at 9.5%, 2.41x at 10.5%, 2.33x at 11.5%. Coverage holds above 1.25x even 200 basis points above the assumed rate.</a:t>
             </a:r>
             <a:endParaRPr lang="en-US" sz="1050" dirty="0"/>
           </a:p>
@@ -35917,7 +35934,7 @@
                           <a:ea typeface="Calibri" pitchFamily="34" charset="-122"/>
                           <a:cs typeface="Calibri" pitchFamily="34" charset="-120"/>
                         </a:rPr>
-                        <a:t>Surgeon (plastic or facial plastic, board certified)</a:t>
+                        <a:t>Surgeon (plastic or facial plastic) · Principal</a:t>
                       </a:r>
                       <a:endParaRPr lang="en-US" sz="950" dirty="0">
                         <a:latin typeface="Calibri" charset="0"/>
@@ -35985,7 +36002,7 @@
                           <a:ea typeface="Calibri" pitchFamily="34" charset="-122"/>
                           <a:cs typeface="Calibri" pitchFamily="34" charset="-120"/>
                         </a:rPr>
-                        <a:t>Operative cases, patient selection, surgical QA</a:t>
+                        <a:t>Operative cases, patient selection, surgical QA. Bills professional fees directly, not facility payroll.</a:t>
                       </a:r>
                       <a:endParaRPr lang="en-US" sz="950" dirty="0">
                         <a:latin typeface="Calibri" charset="0"/>
@@ -36123,7 +36140,7 @@
                           <a:ea typeface="Calibri" pitchFamily="34" charset="-122"/>
                           <a:cs typeface="Calibri" pitchFamily="34" charset="-120"/>
                         </a:rPr>
-                        <a:t>Surgical Technologist and Circulator</a:t>
+                        <a:t>Surgical Tech, Circulator and Monitoring RN</a:t>
                       </a:r>
                       <a:endParaRPr lang="en-US" sz="950" dirty="0">
                         <a:latin typeface="Calibri" charset="0"/>
@@ -36191,7 +36208,7 @@
                           <a:ea typeface="Calibri" pitchFamily="34" charset="-122"/>
                           <a:cs typeface="Calibri" pitchFamily="34" charset="-120"/>
                         </a:rPr>
-                        <a:t>OR setup, sterile field, instrument processing</a:t>
+                        <a:t>OR setup, sterile field, sedation monitoring, PACU, instrument processing</a:t>
                       </a:r>
                       <a:endParaRPr lang="en-US" sz="950" dirty="0">
                         <a:latin typeface="Calibri" charset="0"/>
@@ -38061,7 +38078,7 @@
                           <a:ea typeface="Calibri" pitchFamily="34" charset="-122"/>
                           <a:cs typeface="Calibri" pitchFamily="34" charset="-120"/>
                         </a:rPr>
-                        <a:t>The surgeon leaves and operative volume stops.</a:t>
+                        <a:t>Operating room utilization comes in below plan.</a:t>
                       </a:r>
                       <a:endParaRPr lang="en-US" sz="750" dirty="0">
                         <a:latin typeface="Calibri" charset="0"/>
@@ -38129,7 +38146,7 @@
                           <a:ea typeface="Calibri" pitchFamily="34" charset="-122"/>
                           <a:cs typeface="Calibri" pitchFamily="34" charset="-120"/>
                         </a:rPr>
-                        <a:t>Surgical revenue is roughly a third of the total; the club and clinic carry fixed overhead independently. Coverage holds above 1.25x on the wellness business alone, so a vacant OR delays growth rather than threatening debt service.</a:t>
+                        <a:t>The facility bills for the room, not for a particular surgeon, so this is not one person’s key-person exposure — further credentialed principals can be added without changing the model. Facility fees are roughly a tenth of revenue and the OR runs at 61% of practical capacity, so coverage holds above 1.25x on the wellness business alone.</a:t>
                       </a:r>
                       <a:endParaRPr lang="en-US" sz="750" dirty="0">
                         <a:latin typeface="Calibri" charset="0"/>
@@ -38870,7 +38887,7 @@
                 <a:ea typeface="Calibri" pitchFamily="34" charset="-122"/>
                 <a:cs typeface="Calibri" pitchFamily="34" charset="-120"/>
               </a:rPr>
-              <a:t>Surgical · $2.0M private case  ·  $5.55M project  ·  6,700 SF  ·  3.11x stabilized coverage</a:t>
+              <a:t>Surgical · $2.0M private case  ·  $5.55M project  ·  6,700 SF  ·  2.50x stabilized coverage</a:t>
             </a:r>
             <a:endParaRPr lang="en-US" sz="1150" dirty="0"/>
           </a:p>
@@ -39981,7 +39998,7 @@
                 <a:ea typeface="Calibri" pitchFamily="34" charset="-122"/>
                 <a:cs typeface="Calibri" pitchFamily="34" charset="-120"/>
               </a:rPr>
-              <a:t>Aescape Robotic Massage  ·  Ammortal Chamber  ·  Red Light Therapy  ·  Hyperbaric Oxygen  ·  PRP Injections  ·  Compression / NeuFit  ·  Hormone / Peptide / GLP  ·  IV Therapy (NAD+ / Drips)  ·  Botox &amp; Fillers  ·  Laser Platform  ·  Advanced Biometrics  ·  Morpheus8 RF Microneedling  ·  DNA Analysis  ·  Emsculpt  ·  DUTCH Testing  ·  CoolSculpting  ·  DEXA Scan  ·  Blepharoplasty  ·  Facial Contouring Surgery  ·  Awake Liposuction &amp; Body Contouring  ·  Fat Grafting &amp; Transfer  ·  Hair Restoration Surgery  ·  Office Surgical Procedures  ·  Ablative Laser &amp; Skin Tightening</a:t>
+              <a:t>Aescape Robotic Massage  ·  Ammortal Chamber  ·  Red Light Therapy  ·  Hyperbaric Oxygen  ·  PRP Injections  ·  Compression / NeuFit  ·  Hormone / Peptide / GLP  ·  IV Therapy (NAD+ / Drips)  ·  Botox &amp; Fillers  ·  Laser Platform  ·  Advanced Biometrics  ·  Morpheus8 RF Microneedling  ·  DNA Analysis  ·  Emsculpt  ·  DUTCH Testing  ·  CoolSculpting  ·  DEXA Scan  ·  Blepharoplasty (facility fee)  ·  Facial Contouring Surgery (facility fee)  ·  Awake Liposuction &amp; Body Contouring (facility fee)  ·  Fat Grafting &amp; Transfer (facility fee)  ·  Hair Restoration Surgery  ·  Office Surgical Procedures  ·  Ablative Laser &amp; Skin Tightening</a:t>
             </a:r>
             <a:endParaRPr lang="en-US" sz="950" dirty="0"/>
           </a:p>
@@ -40211,7 +40228,7 @@
                 <a:ea typeface="Calibri" pitchFamily="34" charset="-122"/>
                 <a:cs typeface="Calibri" pitchFamily="34" charset="-120"/>
               </a:rPr>
-              <a:t>A 900 SF office-based surgery suite planned to the published iOR Partners specification, accredited by Quad A. It sits in the clinic layer, so anyone can book it. Surgery is never a membership benefit.</a:t>
+              <a:t>A 900 SF office-based surgery suite planned to the published iOR Partners specification, accredited by Quad A. It sits in the clinic layer, so anyone can book it — surgery is never a membership benefit. L&amp;K bills a facility fee; the operating surgeon is a principal who bills their professional fee directly.</a:t>
             </a:r>
             <a:endParaRPr lang="en-US" sz="1150" dirty="0"/>
           </a:p>
